--- a/topic14-invariants-testing/unit-1/talk-1/a-invariants.pptx
+++ b/topic14-invariants-testing/unit-1/talk-1/a-invariants.pptx
@@ -633,6 +633,18 @@
           <a:p>
             <a:endParaRPr lang="en-US" dirty="0"/>
           </a:p>
+          <a:p>
+            <a:endParaRPr lang="en-US" dirty="0"/>
+          </a:p>
+          <a:p>
+            <a:endParaRPr lang="en-US" dirty="0"/>
+          </a:p>
+          <a:p>
+            <a:endParaRPr lang="en-US" dirty="0"/>
+          </a:p>
+          <a:p>
+            <a:endParaRPr lang="en-US" dirty="0"/>
+          </a:p>
         </p:txBody>
       </p:sp>
       <p:sp>
@@ -1282,7 +1294,7 @@
             <a:fld id="{08B9EBBA-996F-894A-B54A-D6246ED52CEA}" type="datetimeFigureOut">
               <a:rPr lang="en-US" smtClean="0"/>
               <a:pPr/>
-              <a:t>4/13/26</a:t>
+              <a:t>4/23/26</a:t>
             </a:fld>
             <a:endParaRPr lang="en-US" dirty="0"/>
           </a:p>
@@ -1704,7 +1716,7 @@
             <a:fld id="{09B482E8-6E0E-1B4F-B1FD-C69DB9E858D9}" type="datetimeFigureOut">
               <a:rPr lang="en-US" smtClean="0"/>
               <a:pPr/>
-              <a:t>4/13/26</a:t>
+              <a:t>4/23/26</a:t>
             </a:fld>
             <a:endParaRPr lang="en-US" dirty="0"/>
           </a:p>
@@ -2048,7 +2060,7 @@
             <a:fld id="{09B482E8-6E0E-1B4F-B1FD-C69DB9E858D9}" type="datetimeFigureOut">
               <a:rPr lang="en-US" smtClean="0"/>
               <a:pPr/>
-              <a:t>4/13/26</a:t>
+              <a:t>4/23/26</a:t>
             </a:fld>
             <a:endParaRPr lang="en-US" dirty="0"/>
           </a:p>
@@ -2461,7 +2473,7 @@
             <a:fld id="{09B482E8-6E0E-1B4F-B1FD-C69DB9E858D9}" type="datetimeFigureOut">
               <a:rPr lang="en-US" smtClean="0"/>
               <a:pPr/>
-              <a:t>4/13/26</a:t>
+              <a:t>4/23/26</a:t>
             </a:fld>
             <a:endParaRPr lang="en-US" dirty="0"/>
           </a:p>
@@ -3037,7 +3049,7 @@
             <a:fld id="{09B482E8-6E0E-1B4F-B1FD-C69DB9E858D9}" type="datetimeFigureOut">
               <a:rPr lang="en-US" smtClean="0"/>
               <a:pPr/>
-              <a:t>4/13/26</a:t>
+              <a:t>4/23/26</a:t>
             </a:fld>
             <a:endParaRPr lang="en-US" dirty="0"/>
           </a:p>
@@ -3726,7 +3738,7 @@
             <a:fld id="{09B482E8-6E0E-1B4F-B1FD-C69DB9E858D9}" type="datetimeFigureOut">
               <a:rPr lang="en-US" smtClean="0"/>
               <a:pPr/>
-              <a:t>4/13/26</a:t>
+              <a:t>4/23/26</a:t>
             </a:fld>
             <a:endParaRPr lang="en-US" dirty="0"/>
           </a:p>
@@ -4647,7 +4659,7 @@
             <a:fld id="{09B482E8-6E0E-1B4F-B1FD-C69DB9E858D9}" type="datetimeFigureOut">
               <a:rPr lang="en-US" smtClean="0"/>
               <a:pPr/>
-              <a:t>4/13/26</a:t>
+              <a:t>4/23/26</a:t>
             </a:fld>
             <a:endParaRPr lang="en-US" dirty="0"/>
           </a:p>
@@ -4968,7 +4980,7 @@
             <a:fld id="{09B482E8-6E0E-1B4F-B1FD-C69DB9E858D9}" type="datetimeFigureOut">
               <a:rPr lang="en-US" smtClean="0"/>
               <a:pPr/>
-              <a:t>4/13/26</a:t>
+              <a:t>4/23/26</a:t>
             </a:fld>
             <a:endParaRPr lang="en-US" dirty="0"/>
           </a:p>
@@ -5240,7 +5252,7 @@
             <a:fld id="{09B482E8-6E0E-1B4F-B1FD-C69DB9E858D9}" type="datetimeFigureOut">
               <a:rPr lang="en-US" smtClean="0"/>
               <a:pPr/>
-              <a:t>4/13/26</a:t>
+              <a:t>4/23/26</a:t>
             </a:fld>
             <a:endParaRPr lang="en-US" dirty="0"/>
           </a:p>
@@ -5637,7 +5649,7 @@
             <a:fld id="{08B9EBBA-996F-894A-B54A-D6246ED52CEA}" type="datetimeFigureOut">
               <a:rPr lang="en-US" smtClean="0"/>
               <a:pPr/>
-              <a:t>4/13/26</a:t>
+              <a:t>4/23/26</a:t>
             </a:fld>
             <a:endParaRPr lang="en-US" dirty="0"/>
           </a:p>
@@ -5964,7 +5976,7 @@
             <a:fld id="{09B482E8-6E0E-1B4F-B1FD-C69DB9E858D9}" type="datetimeFigureOut">
               <a:rPr lang="en-US" smtClean="0"/>
               <a:pPr/>
-              <a:t>4/13/26</a:t>
+              <a:t>4/23/26</a:t>
             </a:fld>
             <a:endParaRPr lang="en-US" dirty="0"/>
           </a:p>
@@ -6294,7 +6306,7 @@
             <a:fld id="{09B482E8-6E0E-1B4F-B1FD-C69DB9E858D9}" type="datetimeFigureOut">
               <a:rPr lang="en-US" smtClean="0"/>
               <a:pPr/>
-              <a:t>4/13/26</a:t>
+              <a:t>4/23/26</a:t>
             </a:fld>
             <a:endParaRPr lang="en-US" dirty="0"/>
           </a:p>
@@ -6709,7 +6721,7 @@
             <a:fld id="{8DFA1846-DA80-1C48-A609-854EA85C59AD}" type="datetimeFigureOut">
               <a:rPr lang="en-US" smtClean="0"/>
               <a:pPr/>
-              <a:t>4/13/26</a:t>
+              <a:t>4/23/26</a:t>
             </a:fld>
             <a:endParaRPr lang="en-US" dirty="0"/>
           </a:p>
@@ -7116,7 +7128,7 @@
             <a:fld id="{09B482E8-6E0E-1B4F-B1FD-C69DB9E858D9}" type="datetimeFigureOut">
               <a:rPr lang="en-US" smtClean="0"/>
               <a:pPr/>
-              <a:t>4/13/26</a:t>
+              <a:t>4/23/26</a:t>
             </a:fld>
             <a:endParaRPr lang="en-US" dirty="0"/>
           </a:p>
@@ -7643,7 +7655,7 @@
             <a:fld id="{09B482E8-6E0E-1B4F-B1FD-C69DB9E858D9}" type="datetimeFigureOut">
               <a:rPr lang="en-US" smtClean="0"/>
               <a:pPr/>
-              <a:t>4/13/26</a:t>
+              <a:t>4/23/26</a:t>
             </a:fld>
             <a:endParaRPr lang="en-US" dirty="0"/>
           </a:p>
@@ -7921,7 +7933,7 @@
             <a:fld id="{F13A34C8-038E-2045-AF43-DF7DBB8E0E9E}" type="datetimeFigureOut">
               <a:rPr lang="en-US" smtClean="0"/>
               <a:pPr/>
-              <a:t>4/13/26</a:t>
+              <a:t>4/23/26</a:t>
             </a:fld>
             <a:endParaRPr lang="en-US" dirty="0"/>
           </a:p>
@@ -8098,7 +8110,7 @@
             <a:fld id="{8818C68F-D26B-8F47-958C-23B49CF8A634}" type="datetimeFigureOut">
               <a:rPr lang="en-US" smtClean="0"/>
               <a:pPr/>
-              <a:t>4/13/26</a:t>
+              <a:t>4/23/26</a:t>
             </a:fld>
             <a:endParaRPr lang="en-US" dirty="0"/>
           </a:p>
@@ -8509,7 +8521,7 @@
             <a:fld id="{09B482E8-6E0E-1B4F-B1FD-C69DB9E858D9}" type="datetimeFigureOut">
               <a:rPr lang="en-US" smtClean="0"/>
               <a:pPr/>
-              <a:t>4/13/26</a:t>
+              <a:t>4/23/26</a:t>
             </a:fld>
             <a:endParaRPr lang="en-US" dirty="0"/>
           </a:p>
@@ -8939,7 +8951,7 @@
             <a:fld id="{09B482E8-6E0E-1B4F-B1FD-C69DB9E858D9}" type="datetimeFigureOut">
               <a:rPr lang="en-US" smtClean="0"/>
               <a:pPr/>
-              <a:t>4/13/26</a:t>
+              <a:t>4/23/26</a:t>
             </a:fld>
             <a:endParaRPr lang="en-US" dirty="0"/>
           </a:p>
@@ -9369,7 +9381,7 @@
             <a:fld id="{09B482E8-6E0E-1B4F-B1FD-C69DB9E858D9}" type="datetimeFigureOut">
               <a:rPr lang="en-US" smtClean="0"/>
               <a:pPr/>
-              <a:t>4/13/26</a:t>
+              <a:t>4/23/26</a:t>
             </a:fld>
             <a:endParaRPr lang="en-US" dirty="0"/>
           </a:p>
@@ -9726,7 +9738,7 @@
             <a:fld id="{09B482E8-6E0E-1B4F-B1FD-C69DB9E858D9}" type="datetimeFigureOut">
               <a:rPr lang="en-US" smtClean="0"/>
               <a:pPr/>
-              <a:t>4/13/26</a:t>
+              <a:t>4/23/26</a:t>
             </a:fld>
             <a:endParaRPr lang="en-US" dirty="0"/>
           </a:p>
@@ -10128,7 +10140,7 @@
             <a:fld id="{8DFA1846-DA80-1C48-A609-854EA85C59AD}" type="datetimeFigureOut">
               <a:rPr lang="en-US" smtClean="0"/>
               <a:pPr/>
-              <a:t>4/13/26</a:t>
+              <a:t>4/23/26</a:t>
             </a:fld>
             <a:endParaRPr lang="en-US" dirty="0"/>
           </a:p>
@@ -10554,7 +10566,7 @@
             <a:fld id="{09B482E8-6E0E-1B4F-B1FD-C69DB9E858D9}" type="datetimeFigureOut">
               <a:rPr lang="en-US" smtClean="0"/>
               <a:pPr/>
-              <a:t>4/13/26</a:t>
+              <a:t>4/23/26</a:t>
             </a:fld>
             <a:endParaRPr lang="en-US" dirty="0"/>
           </a:p>
@@ -11143,7 +11155,7 @@
             <a:fld id="{09B482E8-6E0E-1B4F-B1FD-C69DB9E858D9}" type="datetimeFigureOut">
               <a:rPr lang="en-US" smtClean="0"/>
               <a:pPr/>
-              <a:t>4/13/26</a:t>
+              <a:t>4/23/26</a:t>
             </a:fld>
             <a:endParaRPr lang="en-US" dirty="0"/>
           </a:p>
@@ -11845,7 +11857,7 @@
             <a:fld id="{09B482E8-6E0E-1B4F-B1FD-C69DB9E858D9}" type="datetimeFigureOut">
               <a:rPr lang="en-US" smtClean="0"/>
               <a:pPr/>
-              <a:t>4/13/26</a:t>
+              <a:t>4/23/26</a:t>
             </a:fld>
             <a:endParaRPr lang="en-US" dirty="0"/>
           </a:p>
@@ -12779,7 +12791,7 @@
             <a:fld id="{09B482E8-6E0E-1B4F-B1FD-C69DB9E858D9}" type="datetimeFigureOut">
               <a:rPr lang="en-US" smtClean="0"/>
               <a:pPr/>
-              <a:t>4/13/26</a:t>
+              <a:t>4/23/26</a:t>
             </a:fld>
             <a:endParaRPr lang="en-US" dirty="0"/>
           </a:p>
@@ -13118,7 +13130,7 @@
             <a:fld id="{09B482E8-6E0E-1B4F-B1FD-C69DB9E858D9}" type="datetimeFigureOut">
               <a:rPr lang="en-US" smtClean="0"/>
               <a:pPr/>
-              <a:t>4/13/26</a:t>
+              <a:t>4/23/26</a:t>
             </a:fld>
             <a:endParaRPr lang="en-US" dirty="0"/>
           </a:p>
@@ -13405,7 +13417,7 @@
             <a:fld id="{09B482E8-6E0E-1B4F-B1FD-C69DB9E858D9}" type="datetimeFigureOut">
               <a:rPr lang="en-US" smtClean="0"/>
               <a:pPr/>
-              <a:t>4/13/26</a:t>
+              <a:t>4/23/26</a:t>
             </a:fld>
             <a:endParaRPr lang="en-US" dirty="0"/>
           </a:p>
@@ -13833,7 +13845,7 @@
             <a:fld id="{09B482E8-6E0E-1B4F-B1FD-C69DB9E858D9}" type="datetimeFigureOut">
               <a:rPr lang="en-US" smtClean="0"/>
               <a:pPr/>
-              <a:t>4/13/26</a:t>
+              <a:t>4/23/26</a:t>
             </a:fld>
             <a:endParaRPr lang="en-US" dirty="0"/>
           </a:p>
@@ -14347,7 +14359,7 @@
             <a:fld id="{09B482E8-6E0E-1B4F-B1FD-C69DB9E858D9}" type="datetimeFigureOut">
               <a:rPr lang="en-US" smtClean="0"/>
               <a:pPr/>
-              <a:t>4/13/26</a:t>
+              <a:t>4/23/26</a:t>
             </a:fld>
             <a:endParaRPr lang="en-US" dirty="0"/>
           </a:p>
@@ -14612,7 +14624,7 @@
             <a:fld id="{F13A34C8-038E-2045-AF43-DF7DBB8E0E9E}" type="datetimeFigureOut">
               <a:rPr lang="en-US" smtClean="0"/>
               <a:pPr/>
-              <a:t>4/13/26</a:t>
+              <a:t>4/23/26</a:t>
             </a:fld>
             <a:endParaRPr lang="en-US" dirty="0"/>
           </a:p>
@@ -14790,7 +14802,7 @@
             <a:fld id="{8818C68F-D26B-8F47-958C-23B49CF8A634}" type="datetimeFigureOut">
               <a:rPr lang="en-US" smtClean="0"/>
               <a:pPr/>
-              <a:t>4/13/26</a:t>
+              <a:t>4/23/26</a:t>
             </a:fld>
             <a:endParaRPr lang="en-US" dirty="0"/>
           </a:p>
@@ -15188,7 +15200,7 @@
             <a:fld id="{09B482E8-6E0E-1B4F-B1FD-C69DB9E858D9}" type="datetimeFigureOut">
               <a:rPr lang="en-US" smtClean="0"/>
               <a:pPr/>
-              <a:t>4/13/26</a:t>
+              <a:t>4/23/26</a:t>
             </a:fld>
             <a:endParaRPr lang="en-US" dirty="0"/>
           </a:p>
@@ -15605,7 +15617,7 @@
             <a:fld id="{09B482E8-6E0E-1B4F-B1FD-C69DB9E858D9}" type="datetimeFigureOut">
               <a:rPr lang="en-US" smtClean="0"/>
               <a:pPr/>
-              <a:t>4/13/26</a:t>
+              <a:t>4/23/26</a:t>
             </a:fld>
             <a:endParaRPr lang="en-US" dirty="0"/>
           </a:p>
@@ -15857,7 +15869,7 @@
             <a:fld id="{09B482E8-6E0E-1B4F-B1FD-C69DB9E858D9}" type="datetimeFigureOut">
               <a:rPr lang="en-US" smtClean="0"/>
               <a:pPr/>
-              <a:t>4/13/26</a:t>
+              <a:t>4/23/26</a:t>
             </a:fld>
             <a:endParaRPr lang="en-US" dirty="0"/>
           </a:p>
@@ -16318,7 +16330,7 @@
           </a:prstGeom>
           <a:extLst>
             <a:ext uri="{909E8E84-426E-40dd-AFC4-6F175D3DCCD1}">
-              <a14:hiddenFill xmlns="" xmlns:a14="http://schemas.microsoft.com/office/drawing/2010/main">
+              <a14:hiddenFill xmlns:a14="http://schemas.microsoft.com/office/drawing/2010/main" xmlns="">
                 <a:solidFill>
                   <a:srgbClr val="FFFFFF"/>
                 </a:solidFill>
@@ -16458,7 +16470,7 @@
             <a:fld id="{09B482E8-6E0E-1B4F-B1FD-C69DB9E858D9}" type="datetimeFigureOut">
               <a:rPr lang="en-US" smtClean="0"/>
               <a:pPr/>
-              <a:t>4/13/26</a:t>
+              <a:t>4/23/26</a:t>
             </a:fld>
             <a:endParaRPr lang="en-US" dirty="0"/>
           </a:p>
@@ -16897,14 +16909,14 @@
           <a:ln/>
           <a:extLst>
             <a:ext uri="{909E8E84-426E-40dd-AFC4-6F175D3DCCD1}">
-              <a14:hiddenFill xmlns:a14="http://schemas.microsoft.com/office/drawing/2010/main" xmlns="">
+              <a14:hiddenFill xmlns="" xmlns:a14="http://schemas.microsoft.com/office/drawing/2010/main">
                 <a:solidFill>
                   <a:srgbClr val="FFFFFF"/>
                 </a:solidFill>
               </a14:hiddenFill>
             </a:ext>
             <a:ext uri="{91240B29-F687-4f45-9708-019B960494DF}">
-              <a14:hiddenLine xmlns:a14="http://schemas.microsoft.com/office/drawing/2010/main" xmlns="" w="9525">
+              <a14:hiddenLine xmlns="" xmlns:a14="http://schemas.microsoft.com/office/drawing/2010/main" w="9525">
                 <a:solidFill>
                   <a:srgbClr val="000000"/>
                 </a:solidFill>
@@ -17057,14 +17069,14 @@
           </a:ln>
           <a:extLst>
             <a:ext uri="{909E8E84-426E-40dd-AFC4-6F175D3DCCD1}">
-              <a14:hiddenFill xmlns:a14="http://schemas.microsoft.com/office/drawing/2010/main" xmlns="">
+              <a14:hiddenFill xmlns="" xmlns:a14="http://schemas.microsoft.com/office/drawing/2010/main">
                 <a:solidFill>
                   <a:srgbClr val="FFFFFF"/>
                 </a:solidFill>
               </a14:hiddenFill>
             </a:ext>
             <a:ext uri="{91240B29-F687-4f45-9708-019B960494DF}">
-              <a14:hiddenLine xmlns:a14="http://schemas.microsoft.com/office/drawing/2010/main" xmlns="" w="9525">
+              <a14:hiddenLine xmlns="" xmlns:a14="http://schemas.microsoft.com/office/drawing/2010/main" w="9525">
                 <a:solidFill>
                   <a:srgbClr val="000000"/>
                 </a:solidFill>
@@ -17223,14 +17235,14 @@
           </a:ln>
           <a:extLst>
             <a:ext uri="{909E8E84-426E-40dd-AFC4-6F175D3DCCD1}">
-              <a14:hiddenFill xmlns:a14="http://schemas.microsoft.com/office/drawing/2010/main" xmlns="">
+              <a14:hiddenFill xmlns="" xmlns:a14="http://schemas.microsoft.com/office/drawing/2010/main">
                 <a:solidFill>
                   <a:srgbClr val="FFFFFF"/>
                 </a:solidFill>
               </a14:hiddenFill>
             </a:ext>
             <a:ext uri="{91240B29-F687-4f45-9708-019B960494DF}">
-              <a14:hiddenLine xmlns:a14="http://schemas.microsoft.com/office/drawing/2010/main" xmlns="" w="9525">
+              <a14:hiddenLine xmlns="" xmlns:a14="http://schemas.microsoft.com/office/drawing/2010/main" w="9525">
                 <a:solidFill>
                   <a:srgbClr val="000000"/>
                 </a:solidFill>
@@ -17335,14 +17347,14 @@
           </a:ln>
           <a:extLst>
             <a:ext uri="{909E8E84-426E-40dd-AFC4-6F175D3DCCD1}">
-              <a14:hiddenFill xmlns:a14="http://schemas.microsoft.com/office/drawing/2010/main" xmlns="">
+              <a14:hiddenFill xmlns="" xmlns:a14="http://schemas.microsoft.com/office/drawing/2010/main">
                 <a:solidFill>
                   <a:srgbClr val="FFFFFF"/>
                 </a:solidFill>
               </a14:hiddenFill>
             </a:ext>
             <a:ext uri="{91240B29-F687-4f45-9708-019B960494DF}">
-              <a14:hiddenLine xmlns:a14="http://schemas.microsoft.com/office/drawing/2010/main" xmlns="" w="9525">
+              <a14:hiddenLine xmlns="" xmlns:a14="http://schemas.microsoft.com/office/drawing/2010/main" w="9525">
                 <a:solidFill>
                   <a:srgbClr val="000000"/>
                 </a:solidFill>
@@ -17668,14 +17680,14 @@
           <a:ln/>
           <a:extLst>
             <a:ext uri="{909E8E84-426E-40dd-AFC4-6F175D3DCCD1}">
-              <a14:hiddenFill xmlns="" xmlns:a14="http://schemas.microsoft.com/office/drawing/2010/main">
+              <a14:hiddenFill xmlns:a14="http://schemas.microsoft.com/office/drawing/2010/main" xmlns="">
                 <a:solidFill>
                   <a:srgbClr val="FFFFFF"/>
                 </a:solidFill>
               </a14:hiddenFill>
             </a:ext>
             <a:ext uri="{91240B29-F687-4f45-9708-019B960494DF}">
-              <a14:hiddenLine xmlns="" xmlns:a14="http://schemas.microsoft.com/office/drawing/2010/main" w="9525">
+              <a14:hiddenLine xmlns:a14="http://schemas.microsoft.com/office/drawing/2010/main" xmlns="" w="9525">
                 <a:solidFill>
                   <a:srgbClr val="000000"/>
                 </a:solidFill>
@@ -18420,14 +18432,14 @@
         <p:spPr>
           <a:extLst>
             <a:ext uri="{909E8E84-426E-40dd-AFC4-6F175D3DCCD1}">
-              <a14:hiddenFill xmlns:a14="http://schemas.microsoft.com/office/drawing/2010/main" xmlns="">
+              <a14:hiddenFill xmlns="" xmlns:a14="http://schemas.microsoft.com/office/drawing/2010/main">
                 <a:solidFill>
                   <a:srgbClr val="FFFFFF"/>
                 </a:solidFill>
               </a14:hiddenFill>
             </a:ext>
             <a:ext uri="{91240B29-F687-4f45-9708-019B960494DF}">
-              <a14:hiddenLine xmlns:a14="http://schemas.microsoft.com/office/drawing/2010/main" xmlns="" w="9525">
+              <a14:hiddenLine xmlns="" xmlns:a14="http://schemas.microsoft.com/office/drawing/2010/main" w="9525">
                 <a:solidFill>
                   <a:srgbClr val="000000"/>
                 </a:solidFill>
@@ -19055,14 +19067,14 @@
           <a:ln/>
           <a:extLst>
             <a:ext uri="{909E8E84-426E-40dd-AFC4-6F175D3DCCD1}">
-              <a14:hiddenFill xmlns="" xmlns:a14="http://schemas.microsoft.com/office/drawing/2010/main">
+              <a14:hiddenFill xmlns:a14="http://schemas.microsoft.com/office/drawing/2010/main" xmlns="">
                 <a:solidFill>
                   <a:srgbClr val="FFFFFF"/>
                 </a:solidFill>
               </a14:hiddenFill>
             </a:ext>
             <a:ext uri="{91240B29-F687-4f45-9708-019B960494DF}">
-              <a14:hiddenLine xmlns="" xmlns:a14="http://schemas.microsoft.com/office/drawing/2010/main" w="9525">
+              <a14:hiddenLine xmlns:a14="http://schemas.microsoft.com/office/drawing/2010/main" xmlns="" w="9525">
                 <a:solidFill>
                   <a:srgbClr val="000000"/>
                 </a:solidFill>
@@ -20475,14 +20487,14 @@
           <a:ln/>
           <a:extLst>
             <a:ext uri="{909E8E84-426E-40dd-AFC4-6F175D3DCCD1}">
-              <a14:hiddenFill xmlns="" xmlns:a14="http://schemas.microsoft.com/office/drawing/2010/main">
+              <a14:hiddenFill xmlns:a14="http://schemas.microsoft.com/office/drawing/2010/main" xmlns="">
                 <a:solidFill>
                   <a:srgbClr val="FFFFFF"/>
                 </a:solidFill>
               </a14:hiddenFill>
             </a:ext>
             <a:ext uri="{91240B29-F687-4f45-9708-019B960494DF}">
-              <a14:hiddenLine xmlns="" xmlns:a14="http://schemas.microsoft.com/office/drawing/2010/main" w="9525">
+              <a14:hiddenLine xmlns:a14="http://schemas.microsoft.com/office/drawing/2010/main" xmlns="" w="9525">
                 <a:solidFill>
                   <a:srgbClr val="000000"/>
                 </a:solidFill>
@@ -21560,14 +21572,14 @@
           <a:ln/>
           <a:extLst>
             <a:ext uri="{909E8E84-426E-40dd-AFC4-6F175D3DCCD1}">
-              <a14:hiddenFill xmlns="" xmlns:a14="http://schemas.microsoft.com/office/drawing/2010/main">
+              <a14:hiddenFill xmlns:a14="http://schemas.microsoft.com/office/drawing/2010/main" xmlns="">
                 <a:solidFill>
                   <a:srgbClr val="FFFFFF"/>
                 </a:solidFill>
               </a14:hiddenFill>
             </a:ext>
             <a:ext uri="{91240B29-F687-4f45-9708-019B960494DF}">
-              <a14:hiddenLine xmlns="" xmlns:a14="http://schemas.microsoft.com/office/drawing/2010/main" w="9525">
+              <a14:hiddenLine xmlns:a14="http://schemas.microsoft.com/office/drawing/2010/main" xmlns="" w="9525">
                 <a:solidFill>
                   <a:srgbClr val="000000"/>
                 </a:solidFill>
@@ -22732,14 +22744,14 @@
           <a:ln/>
           <a:extLst>
             <a:ext uri="{909E8E84-426E-40dd-AFC4-6F175D3DCCD1}">
-              <a14:hiddenFill xmlns="" xmlns:a14="http://schemas.microsoft.com/office/drawing/2010/main">
+              <a14:hiddenFill xmlns:a14="http://schemas.microsoft.com/office/drawing/2010/main" xmlns="">
                 <a:solidFill>
                   <a:srgbClr val="FFFFFF"/>
                 </a:solidFill>
               </a14:hiddenFill>
             </a:ext>
             <a:ext uri="{91240B29-F687-4f45-9708-019B960494DF}">
-              <a14:hiddenLine xmlns="" xmlns:a14="http://schemas.microsoft.com/office/drawing/2010/main" w="9525">
+              <a14:hiddenLine xmlns:a14="http://schemas.microsoft.com/office/drawing/2010/main" xmlns="" w="9525">
                 <a:solidFill>
                   <a:srgbClr val="000000"/>
                 </a:solidFill>
@@ -24259,14 +24271,14 @@
           <a:ln/>
           <a:extLst>
             <a:ext uri="{909E8E84-426E-40dd-AFC4-6F175D3DCCD1}">
-              <a14:hiddenFill xmlns="" xmlns:a14="http://schemas.microsoft.com/office/drawing/2010/main">
+              <a14:hiddenFill xmlns:a14="http://schemas.microsoft.com/office/drawing/2010/main" xmlns="">
                 <a:solidFill>
                   <a:srgbClr val="FFFFFF"/>
                 </a:solidFill>
               </a14:hiddenFill>
             </a:ext>
             <a:ext uri="{91240B29-F687-4f45-9708-019B960494DF}">
-              <a14:hiddenLine xmlns="" xmlns:a14="http://schemas.microsoft.com/office/drawing/2010/main" w="9525">
+              <a14:hiddenLine xmlns:a14="http://schemas.microsoft.com/office/drawing/2010/main" xmlns="" w="9525">
                 <a:solidFill>
                   <a:srgbClr val="000000"/>
                 </a:solidFill>
@@ -25647,14 +25659,14 @@
           <a:ln/>
           <a:extLst>
             <a:ext uri="{909E8E84-426E-40dd-AFC4-6F175D3DCCD1}">
-              <a14:hiddenFill xmlns="" xmlns:a14="http://schemas.microsoft.com/office/drawing/2010/main">
+              <a14:hiddenFill xmlns:a14="http://schemas.microsoft.com/office/drawing/2010/main" xmlns="">
                 <a:solidFill>
                   <a:srgbClr val="FFFFFF"/>
                 </a:solidFill>
               </a14:hiddenFill>
             </a:ext>
             <a:ext uri="{91240B29-F687-4f45-9708-019B960494DF}">
-              <a14:hiddenLine xmlns="" xmlns:a14="http://schemas.microsoft.com/office/drawing/2010/main" w="9525">
+              <a14:hiddenLine xmlns:a14="http://schemas.microsoft.com/office/drawing/2010/main" xmlns="" w="9525">
                 <a:solidFill>
                   <a:srgbClr val="000000"/>
                 </a:solidFill>
@@ -27329,14 +27341,14 @@
           <a:ln/>
           <a:extLst>
             <a:ext uri="{909E8E84-426E-40dd-AFC4-6F175D3DCCD1}">
-              <a14:hiddenFill xmlns="" xmlns:a14="http://schemas.microsoft.com/office/drawing/2010/main">
+              <a14:hiddenFill xmlns:a14="http://schemas.microsoft.com/office/drawing/2010/main" xmlns="">
                 <a:solidFill>
                   <a:srgbClr val="FFFFFF"/>
                 </a:solidFill>
               </a14:hiddenFill>
             </a:ext>
             <a:ext uri="{91240B29-F687-4f45-9708-019B960494DF}">
-              <a14:hiddenLine xmlns="" xmlns:a14="http://schemas.microsoft.com/office/drawing/2010/main" w="9525">
+              <a14:hiddenLine xmlns:a14="http://schemas.microsoft.com/office/drawing/2010/main" xmlns="" w="9525">
                 <a:solidFill>
                   <a:srgbClr val="000000"/>
                 </a:solidFill>
@@ -29128,14 +29140,14 @@
           <a:ln/>
           <a:extLst>
             <a:ext uri="{909E8E84-426E-40dd-AFC4-6F175D3DCCD1}">
-              <a14:hiddenFill xmlns="" xmlns:a14="http://schemas.microsoft.com/office/drawing/2010/main">
+              <a14:hiddenFill xmlns:a14="http://schemas.microsoft.com/office/drawing/2010/main" xmlns="">
                 <a:solidFill>
                   <a:srgbClr val="FFFFFF"/>
                 </a:solidFill>
               </a14:hiddenFill>
             </a:ext>
             <a:ext uri="{91240B29-F687-4f45-9708-019B960494DF}">
-              <a14:hiddenLine xmlns="" xmlns:a14="http://schemas.microsoft.com/office/drawing/2010/main" w="9525">
+              <a14:hiddenLine xmlns:a14="http://schemas.microsoft.com/office/drawing/2010/main" xmlns="" w="9525">
                 <a:solidFill>
                   <a:srgbClr val="000000"/>
                 </a:solidFill>
